--- a/submissions/Smart-Recovery Phase 1 Executive Briefing.pptx
+++ b/submissions/Smart-Recovery Phase 1 Executive Briefing.pptx
@@ -900,7 +900,8 @@
               <a:buNone/>
             </a:pPr>
             <a:r>
-              <a:t/>
+              <a:rPr lang="en"/>
+              <a:t>This is what we are asking for. Everything after this slide is the evidence to support these asks. To summarise</a:t>
             </a:r>
             <a:endParaRPr/>
           </a:p>
@@ -999,7 +1000,8 @@
               <a:buNone/>
             </a:pPr>
             <a:r>
-              <a:t/>
+              <a:rPr lang="en"/>
+              <a:t>These are the current issues we have scale, where more than 50 agents are focused on legacy tools, with more than 10+ minutes on each case hunting for information. Lastly, 15% revenue leaks resulted from this operational complexity.</a:t>
             </a:r>
             <a:endParaRPr/>
           </a:p>
@@ -1098,7 +1100,8 @@
               <a:buNone/>
             </a:pPr>
             <a:r>
-              <a:t/>
+              <a:rPr lang="en"/>
+              <a:t>These aren’t hypothetical, they are direct quotes extracted from stakeholder interviews, and each of them map to a specific opportunity.</a:t>
             </a:r>
             <a:endParaRPr/>
           </a:p>
@@ -1197,7 +1200,8 @@
               <a:buNone/>
             </a:pPr>
             <a:r>
-              <a:t/>
+              <a:rPr lang="en"/>
+              <a:t>Daniel, not all of the opportunities have a positive ROI, but I am telling you why they are being funded regardless. I have evidence of what would need to hold for the opportunities to achieve their predicted uplift, which can bring major profits to the company by the end of the full implementation of this portal.</a:t>
             </a:r>
             <a:endParaRPr/>
           </a:p>
@@ -1296,7 +1300,8 @@
               <a:buNone/>
             </a:pPr>
             <a:r>
-              <a:t/>
+              <a:rPr lang="en"/>
+              <a:t>The exclusions are what will make phase 1 effective and credible. These are things that need assessment of the in-scope deliverables to see if they will be effective when implemented. They are all predicted to bring in returns when considering uplift even in conservative scenarios.</a:t>
             </a:r>
             <a:endParaRPr/>
           </a:p>
@@ -1395,7 +1400,8 @@
               <a:buNone/>
             </a:pPr>
             <a:r>
-              <a:t/>
+              <a:rPr lang="en"/>
+              <a:t>This phase will not come free of risks. These are the risks we are expecting, and each of these come with mitigations.</a:t>
             </a:r>
             <a:endParaRPr/>
           </a:p>
@@ -1494,7 +1500,8 @@
               <a:buNone/>
             </a:pPr>
             <a:r>
-              <a:t/>
+              <a:rPr lang="en"/>
+              <a:t>And this is the ask all summarised, do I have your approval to proceed on this basis from today?</a:t>
             </a:r>
             <a:endParaRPr/>
           </a:p>
